--- a/supp/Publication/images/RawPPT/2026-SIGGRAPH-CoordinateMotion.pptx
+++ b/supp/Publication/images/RawPPT/2026-SIGGRAPH-CoordinateMotion.pptx
@@ -243,7 +243,7 @@
           <a:p>
             <a:fld id="{086FEB8E-2718-4465-8CCF-70A494D0B418}" type="datetimeFigureOut">
               <a:rPr lang="zh-CN" altLang="en-US" smtClean="0"/>
-              <a:t>2026/3/30</a:t>
+              <a:t>2026/4/5</a:t>
             </a:fld>
             <a:endParaRPr lang="zh-CN" altLang="en-US"/>
           </a:p>
@@ -413,7 +413,7 @@
           <a:p>
             <a:fld id="{086FEB8E-2718-4465-8CCF-70A494D0B418}" type="datetimeFigureOut">
               <a:rPr lang="zh-CN" altLang="en-US" smtClean="0"/>
-              <a:t>2026/3/30</a:t>
+              <a:t>2026/4/5</a:t>
             </a:fld>
             <a:endParaRPr lang="zh-CN" altLang="en-US"/>
           </a:p>
@@ -593,7 +593,7 @@
           <a:p>
             <a:fld id="{086FEB8E-2718-4465-8CCF-70A494D0B418}" type="datetimeFigureOut">
               <a:rPr lang="zh-CN" altLang="en-US" smtClean="0"/>
-              <a:t>2026/3/30</a:t>
+              <a:t>2026/4/5</a:t>
             </a:fld>
             <a:endParaRPr lang="zh-CN" altLang="en-US"/>
           </a:p>
@@ -763,7 +763,7 @@
           <a:p>
             <a:fld id="{086FEB8E-2718-4465-8CCF-70A494D0B418}" type="datetimeFigureOut">
               <a:rPr lang="zh-CN" altLang="en-US" smtClean="0"/>
-              <a:t>2026/3/30</a:t>
+              <a:t>2026/4/5</a:t>
             </a:fld>
             <a:endParaRPr lang="zh-CN" altLang="en-US"/>
           </a:p>
@@ -1009,7 +1009,7 @@
           <a:p>
             <a:fld id="{086FEB8E-2718-4465-8CCF-70A494D0B418}" type="datetimeFigureOut">
               <a:rPr lang="zh-CN" altLang="en-US" smtClean="0"/>
-              <a:t>2026/3/30</a:t>
+              <a:t>2026/4/5</a:t>
             </a:fld>
             <a:endParaRPr lang="zh-CN" altLang="en-US"/>
           </a:p>
@@ -1241,7 +1241,7 @@
           <a:p>
             <a:fld id="{086FEB8E-2718-4465-8CCF-70A494D0B418}" type="datetimeFigureOut">
               <a:rPr lang="zh-CN" altLang="en-US" smtClean="0"/>
-              <a:t>2026/3/30</a:t>
+              <a:t>2026/4/5</a:t>
             </a:fld>
             <a:endParaRPr lang="zh-CN" altLang="en-US"/>
           </a:p>
@@ -1608,7 +1608,7 @@
           <a:p>
             <a:fld id="{086FEB8E-2718-4465-8CCF-70A494D0B418}" type="datetimeFigureOut">
               <a:rPr lang="zh-CN" altLang="en-US" smtClean="0"/>
-              <a:t>2026/3/30</a:t>
+              <a:t>2026/4/5</a:t>
             </a:fld>
             <a:endParaRPr lang="zh-CN" altLang="en-US"/>
           </a:p>
@@ -1726,7 +1726,7 @@
           <a:p>
             <a:fld id="{086FEB8E-2718-4465-8CCF-70A494D0B418}" type="datetimeFigureOut">
               <a:rPr lang="zh-CN" altLang="en-US" smtClean="0"/>
-              <a:t>2026/3/30</a:t>
+              <a:t>2026/4/5</a:t>
             </a:fld>
             <a:endParaRPr lang="zh-CN" altLang="en-US"/>
           </a:p>
@@ -1821,7 +1821,7 @@
           <a:p>
             <a:fld id="{086FEB8E-2718-4465-8CCF-70A494D0B418}" type="datetimeFigureOut">
               <a:rPr lang="zh-CN" altLang="en-US" smtClean="0"/>
-              <a:t>2026/3/30</a:t>
+              <a:t>2026/4/5</a:t>
             </a:fld>
             <a:endParaRPr lang="zh-CN" altLang="en-US"/>
           </a:p>
@@ -2098,7 +2098,7 @@
           <a:p>
             <a:fld id="{086FEB8E-2718-4465-8CCF-70A494D0B418}" type="datetimeFigureOut">
               <a:rPr lang="zh-CN" altLang="en-US" smtClean="0"/>
-              <a:t>2026/3/30</a:t>
+              <a:t>2026/4/5</a:t>
             </a:fld>
             <a:endParaRPr lang="zh-CN" altLang="en-US"/>
           </a:p>
@@ -2355,7 +2355,7 @@
           <a:p>
             <a:fld id="{086FEB8E-2718-4465-8CCF-70A494D0B418}" type="datetimeFigureOut">
               <a:rPr lang="zh-CN" altLang="en-US" smtClean="0"/>
-              <a:t>2026/3/30</a:t>
+              <a:t>2026/4/5</a:t>
             </a:fld>
             <a:endParaRPr lang="zh-CN" altLang="en-US"/>
           </a:p>
@@ -2568,7 +2568,7 @@
           <a:p>
             <a:fld id="{086FEB8E-2718-4465-8CCF-70A494D0B418}" type="datetimeFigureOut">
               <a:rPr lang="zh-CN" altLang="en-US" smtClean="0"/>
-              <a:t>2026/3/30</a:t>
+              <a:t>2026/4/5</a:t>
             </a:fld>
             <a:endParaRPr lang="zh-CN" altLang="en-US"/>
           </a:p>
@@ -3160,7 +3160,7 @@
               </a:prstGeom>
               <a:ln w="57150">
                 <a:solidFill>
-                  <a:schemeClr val="accent6"/>
+                  <a:srgbClr val="AD8247"/>
                 </a:solidFill>
                 <a:headEnd type="oval"/>
                 <a:tailEnd type="triangle" w="lg" len="lg"/>

--- a/supp/Publication/images/RawPPT/2026-SIGGRAPH-CoordinateMotion.pptx
+++ b/supp/Publication/images/RawPPT/2026-SIGGRAPH-CoordinateMotion.pptx
@@ -243,7 +243,7 @@
           <a:p>
             <a:fld id="{086FEB8E-2718-4465-8CCF-70A494D0B418}" type="datetimeFigureOut">
               <a:rPr lang="zh-CN" altLang="en-US" smtClean="0"/>
-              <a:t>2026/4/5</a:t>
+              <a:t>2026/4/13</a:t>
             </a:fld>
             <a:endParaRPr lang="zh-CN" altLang="en-US"/>
           </a:p>
@@ -413,7 +413,7 @@
           <a:p>
             <a:fld id="{086FEB8E-2718-4465-8CCF-70A494D0B418}" type="datetimeFigureOut">
               <a:rPr lang="zh-CN" altLang="en-US" smtClean="0"/>
-              <a:t>2026/4/5</a:t>
+              <a:t>2026/4/13</a:t>
             </a:fld>
             <a:endParaRPr lang="zh-CN" altLang="en-US"/>
           </a:p>
@@ -593,7 +593,7 @@
           <a:p>
             <a:fld id="{086FEB8E-2718-4465-8CCF-70A494D0B418}" type="datetimeFigureOut">
               <a:rPr lang="zh-CN" altLang="en-US" smtClean="0"/>
-              <a:t>2026/4/5</a:t>
+              <a:t>2026/4/13</a:t>
             </a:fld>
             <a:endParaRPr lang="zh-CN" altLang="en-US"/>
           </a:p>
@@ -763,7 +763,7 @@
           <a:p>
             <a:fld id="{086FEB8E-2718-4465-8CCF-70A494D0B418}" type="datetimeFigureOut">
               <a:rPr lang="zh-CN" altLang="en-US" smtClean="0"/>
-              <a:t>2026/4/5</a:t>
+              <a:t>2026/4/13</a:t>
             </a:fld>
             <a:endParaRPr lang="zh-CN" altLang="en-US"/>
           </a:p>
@@ -1009,7 +1009,7 @@
           <a:p>
             <a:fld id="{086FEB8E-2718-4465-8CCF-70A494D0B418}" type="datetimeFigureOut">
               <a:rPr lang="zh-CN" altLang="en-US" smtClean="0"/>
-              <a:t>2026/4/5</a:t>
+              <a:t>2026/4/13</a:t>
             </a:fld>
             <a:endParaRPr lang="zh-CN" altLang="en-US"/>
           </a:p>
@@ -1241,7 +1241,7 @@
           <a:p>
             <a:fld id="{086FEB8E-2718-4465-8CCF-70A494D0B418}" type="datetimeFigureOut">
               <a:rPr lang="zh-CN" altLang="en-US" smtClean="0"/>
-              <a:t>2026/4/5</a:t>
+              <a:t>2026/4/13</a:t>
             </a:fld>
             <a:endParaRPr lang="zh-CN" altLang="en-US"/>
           </a:p>
@@ -1608,7 +1608,7 @@
           <a:p>
             <a:fld id="{086FEB8E-2718-4465-8CCF-70A494D0B418}" type="datetimeFigureOut">
               <a:rPr lang="zh-CN" altLang="en-US" smtClean="0"/>
-              <a:t>2026/4/5</a:t>
+              <a:t>2026/4/13</a:t>
             </a:fld>
             <a:endParaRPr lang="zh-CN" altLang="en-US"/>
           </a:p>
@@ -1726,7 +1726,7 @@
           <a:p>
             <a:fld id="{086FEB8E-2718-4465-8CCF-70A494D0B418}" type="datetimeFigureOut">
               <a:rPr lang="zh-CN" altLang="en-US" smtClean="0"/>
-              <a:t>2026/4/5</a:t>
+              <a:t>2026/4/13</a:t>
             </a:fld>
             <a:endParaRPr lang="zh-CN" altLang="en-US"/>
           </a:p>
@@ -1821,7 +1821,7 @@
           <a:p>
             <a:fld id="{086FEB8E-2718-4465-8CCF-70A494D0B418}" type="datetimeFigureOut">
               <a:rPr lang="zh-CN" altLang="en-US" smtClean="0"/>
-              <a:t>2026/4/5</a:t>
+              <a:t>2026/4/13</a:t>
             </a:fld>
             <a:endParaRPr lang="zh-CN" altLang="en-US"/>
           </a:p>
@@ -2098,7 +2098,7 @@
           <a:p>
             <a:fld id="{086FEB8E-2718-4465-8CCF-70A494D0B418}" type="datetimeFigureOut">
               <a:rPr lang="zh-CN" altLang="en-US" smtClean="0"/>
-              <a:t>2026/4/5</a:t>
+              <a:t>2026/4/13</a:t>
             </a:fld>
             <a:endParaRPr lang="zh-CN" altLang="en-US"/>
           </a:p>
@@ -2355,7 +2355,7 @@
           <a:p>
             <a:fld id="{086FEB8E-2718-4465-8CCF-70A494D0B418}" type="datetimeFigureOut">
               <a:rPr lang="zh-CN" altLang="en-US" smtClean="0"/>
-              <a:t>2026/4/5</a:t>
+              <a:t>2026/4/13</a:t>
             </a:fld>
             <a:endParaRPr lang="zh-CN" altLang="en-US"/>
           </a:p>
@@ -2568,7 +2568,7 @@
           <a:p>
             <a:fld id="{086FEB8E-2718-4465-8CCF-70A494D0B418}" type="datetimeFigureOut">
               <a:rPr lang="zh-CN" altLang="en-US" smtClean="0"/>
-              <a:t>2026/4/5</a:t>
+              <a:t>2026/4/13</a:t>
             </a:fld>
             <a:endParaRPr lang="zh-CN" altLang="en-US"/>
           </a:p>
@@ -3160,7 +3160,7 @@
               </a:prstGeom>
               <a:ln w="57150">
                 <a:solidFill>
-                  <a:srgbClr val="AD8247"/>
+                  <a:srgbClr val="E69646"/>
                 </a:solidFill>
                 <a:headEnd type="oval"/>
                 <a:tailEnd type="triangle" w="lg" len="lg"/>
